--- a/presentations/Digital_Twin_Divergence_Advisor_Overview.pptx
+++ b/presentations/Digital_Twin_Divergence_Advisor_Overview.pptx
@@ -1,26 +1,16 @@
 
 <file path=ppt/presentation.xml><?xml version="1.0" encoding="utf-8"?>
-<p:presentation xmlns:a="http://schemas.openxmlformats.org/drawingml/2006/main" xmlns:r="http://schemas.openxmlformats.org/officeDocument/2006/relationships" xmlns:p="http://schemas.openxmlformats.org/presentationml/2006/main" saveSubsetFonts="1" autoCompressPictures="0">
+<p:presentation xmlns:a="http://schemas.openxmlformats.org/drawingml/2006/main" xmlns:p="http://schemas.openxmlformats.org/presentationml/2006/main" xmlns:r="http://schemas.openxmlformats.org/officeDocument/2006/relationships" saveSubsetFonts="1" autoCompressPictures="0">
   <p:sldMasterIdLst>
     <p:sldMasterId id="2147483648" r:id="rId1"/>
   </p:sldMasterIdLst>
   <p:sldIdLst>
     <p:sldId id="256" r:id="rId7"/>
-    <p:sldId id="257" r:id="rId8"/>
-    <p:sldId id="258" r:id="rId9"/>
     <p:sldId id="259" r:id="rId10"/>
-    <p:sldId id="260" r:id="rId11"/>
-    <p:sldId id="261" r:id="rId12"/>
-    <p:sldId id="262" r:id="rId13"/>
-    <p:sldId id="263" r:id="rId14"/>
-    <p:sldId id="264" r:id="rId15"/>
-    <p:sldId id="265" r:id="rId16"/>
-    <p:sldId id="266" r:id="rId17"/>
     <p:sldId id="267" r:id="rId18"/>
     <p:sldId id="268" r:id="rId19"/>
     <p:sldId id="269" r:id="rId20"/>
     <p:sldId id="270" r:id="rId21"/>
-    <p:sldId id="271" r:id="rId22"/>
   </p:sldIdLst>
   <p:sldSz cx="12191695" cy="6858000" type="screen4x3"/>
   <p:notesSz cx="6858000" cy="9144000"/>
@@ -3094,7 +3084,7 @@
 </file>
 
 <file path=ppt/slides/slide1.xml><?xml version="1.0" encoding="utf-8"?>
-<p:sld xmlns:a="http://schemas.openxmlformats.org/drawingml/2006/main" xmlns:p="http://schemas.openxmlformats.org/presentationml/2006/main" xmlns:r="http://schemas.openxmlformats.org/officeDocument/2006/relationships">
+<p:sld xmlns:a="http://schemas.openxmlformats.org/drawingml/2006/main" xmlns:p="http://schemas.openxmlformats.org/presentationml/2006/main">
   <p:cSld>
     <p:bg>
       <p:bgPr>
@@ -3319,7 +3309,7 @@
                 </a:solidFill>
                 <a:latin typeface="Aptos"/>
               </a:rPr>
-              <a:t>A security-aware Digital Twin for mobile rover sensor trust</a:t>
+              <a:t>A security-aware Digital Twin for rover sensor trust</a:t>
             </a:r>
           </a:p>
         </p:txBody>
@@ -3358,7 +3348,7 @@
                 </a:solidFill>
                 <a:latin typeface="Aptos"/>
               </a:rPr>
-              <a:t>Advisor overview: what the project does, how it works, and why it is research-worthy</a:t>
+              <a:t>Advisor update | July 10, 2026</a:t>
             </a:r>
           </a:p>
         </p:txBody>
@@ -3412,7 +3402,7 @@
                 </a:solidFill>
                 <a:latin typeface="Aptos"/>
               </a:rPr>
-              <a:t>Mobile CPS</a:t>
+              <a:t>Crux: T:147 combined telemetry packet</a:t>
             </a:r>
           </a:p>
         </p:txBody>
@@ -3466,7 +3456,7 @@
                 </a:solidFill>
                 <a:latin typeface="Aptos"/>
               </a:rPr>
-              <a:t>Digital Twin</a:t>
+              <a:t>Real rover-to-edge pipeline working</a:t>
             </a:r>
           </a:p>
         </p:txBody>
@@ -3520,7 +3510,7 @@
                 </a:solidFill>
                 <a:latin typeface="Aptos"/>
               </a:rPr>
-              <a:t>Sensor Security</a:t>
+              <a:t>Future work = calibrated field validation</a:t>
             </a:r>
           </a:p>
         </p:txBody>
@@ -3574,7 +3564,7 @@
                 </a:solidFill>
                 <a:latin typeface="Aptos"/>
               </a:rPr>
-              <a:t>Uncertainty-Aware</a:t>
+              <a:t>UGV01 + BN220 bench stack operational</a:t>
             </a:r>
           </a:p>
         </p:txBody>
@@ -3613,7 +3603,7 @@
                 </a:solidFill>
                 <a:latin typeface="Aptos"/>
               </a:rPr>
-              <a:t>Core idea: detect when sensor readings stop matching the rover's physically plausible behavior.</a:t>
+              <a:t>Central claim: the project now has one usable telemetry interface that carries timing, motion, IMU, and GPS state into the digital twin and will support the full experiment campaign.</a:t>
             </a:r>
           </a:p>
         </p:txBody>
@@ -5071,7 +5061,7 @@
 </file>
 
 <file path=ppt/slides/slide12.xml><?xml version="1.0" encoding="utf-8"?>
-<p:sld xmlns:a="http://schemas.openxmlformats.org/drawingml/2006/main" xmlns:p="http://schemas.openxmlformats.org/presentationml/2006/main" xmlns:r="http://schemas.openxmlformats.org/officeDocument/2006/relationships">
+<p:sld xmlns:a="http://schemas.openxmlformats.org/drawingml/2006/main" xmlns:p="http://schemas.openxmlformats.org/presentationml/2006/main">
   <p:cSld>
     <p:bg>
       <p:bgPr>
@@ -5122,7 +5112,7 @@
                 </a:solidFill>
                 <a:latin typeface="Aptos Display"/>
               </a:rPr>
-              <a:t>Implementation Built</a:t>
+              <a:t>Why T:147 Matters</a:t>
             </a:r>
           </a:p>
         </p:txBody>
@@ -5161,7 +5151,7 @@
                 </a:solidFill>
                 <a:latin typeface="Aptos"/>
               </a:rPr>
-              <a:t>The current software already forms a testable Digital Twin pipeline.</a:t>
+              <a:t>This packet is the single input record that drives the research pipeline.</a:t>
             </a:r>
           </a:p>
         </p:txBody>
@@ -5290,7 +5280,7 @@
                 </a:solidFill>
                 <a:latin typeface="Aptos"/>
               </a:rPr>
-              <a:t>telemetry.py</a:t>
+              <a:t>Dead reckoning</a:t>
             </a:r>
           </a:p>
         </p:txBody>
@@ -5329,7 +5319,7 @@
                 </a:solidFill>
                 <a:latin typeface="Aptos"/>
               </a:rPr>
-              <a:t>packet parsing and GPS/local position conversion</a:t>
+              <a:t>enc_left and enc_right support tracked-drive calibration and motion estimation.</a:t>
             </a:r>
           </a:p>
         </p:txBody>
@@ -5413,7 +5403,7 @@
                 </a:solidFill>
                 <a:latin typeface="Aptos"/>
               </a:rPr>
-              <a:t>kinematics.py</a:t>
+              <a:t>Uncertainty context</a:t>
             </a:r>
           </a:p>
         </p:txBody>
@@ -5452,7 +5442,7 @@
                 </a:solidFill>
                 <a:latin typeface="Aptos"/>
               </a:rPr>
-              <a:t>differential-drive rover motion</a:t>
+              <a:t>IMU variability, GPS quality, and timing stress feed the adaptive uncertainty logic.</a:t>
             </a:r>
           </a:p>
         </p:txBody>
@@ -5536,7 +5526,7 @@
                 </a:solidFill>
                 <a:latin typeface="Aptos"/>
               </a:rPr>
-              <a:t>ekf.py</a:t>
+              <a:t>Timing analysis</a:t>
             </a:r>
           </a:p>
         </p:txBody>
@@ -5575,7 +5565,7 @@
                 </a:solidFill>
                 <a:latin typeface="Aptos"/>
               </a:rPr>
-              <a:t>prediction, update, innovation, covariance</a:t>
+              <a:t>seq, sample_ms, send_ms, and edge timestamps support packet loss, stale-packet, queue, and latency analysis.</a:t>
             </a:r>
           </a:p>
         </p:txBody>
@@ -5659,7 +5649,7 @@
                 </a:solidFill>
                 <a:latin typeface="Aptos"/>
               </a:rPr>
-              <a:t>uncertainty.py</a:t>
+              <a:t>Detection pipeline</a:t>
             </a:r>
           </a:p>
         </p:txBody>
@@ -5698,7 +5688,7 @@
                 </a:solidFill>
                 <a:latin typeface="Aptos"/>
               </a:rPr>
-              <a:t>adaptive uncertainty estimation</a:t>
+              <a:t>The same packet replays through the EKF and Mahalanobis detector without changing rover behavior.</a:t>
             </a:r>
           </a:p>
         </p:txBody>
@@ -5782,7 +5772,7 @@
                 </a:solidFill>
                 <a:latin typeface="Aptos"/>
               </a:rPr>
-              <a:t>detector.py</a:t>
+              <a:t>Bench evidence</a:t>
             </a:r>
           </a:p>
         </p:txBody>
@@ -5821,7 +5811,7 @@
                 </a:solidFill>
                 <a:latin typeface="Aptos"/>
               </a:rPr>
-              <a:t>trust decision and detectability boundary</a:t>
+              <a:t>The clean July 9 run achieved 379/379 successful cycles, 0 drops, seq 0 -&gt; 378, and GPS valid throughout.</a:t>
             </a:r>
           </a:p>
         </p:txBody>
@@ -5905,7 +5895,7 @@
                 </a:solidFill>
                 <a:latin typeface="Aptos"/>
               </a:rPr>
-              <a:t>attack.py</a:t>
+              <a:t>Detector evidence</a:t>
             </a:r>
           </a:p>
         </p:txBody>
@@ -5944,7 +5934,7 @@
                 </a:solidFill>
                 <a:latin typeface="Aptos"/>
               </a:rPr>
-              <a:t>step, freeze, replay, drift attacks</a:t>
+              <a:t>Replay detections stayed at 0; max Mahalanobis remained below threshold while satellites improved 8 -&gt; 11 and HDOP improved 1.48 -&gt; 0.92.</a:t>
             </a:r>
           </a:p>
         </p:txBody>
@@ -6028,7 +6018,7 @@
                 </a:solidFill>
                 <a:latin typeface="Aptos"/>
               </a:rPr>
-              <a:t>latency.py</a:t>
+              <a:t>Interpretation</a:t>
             </a:r>
           </a:p>
         </p:txBody>
@@ -6067,7 +6057,7 @@
                 </a:solidFill>
                 <a:latin typeface="Aptos"/>
               </a:rPr>
-              <a:t>timing delay simulation</a:t>
+              <a:t>The packet schema is now good enough to support calibration, benign baselines, and later attack experiments.</a:t>
             </a:r>
           </a:p>
         </p:txBody>
@@ -6151,7 +6141,7 @@
                 </a:solidFill>
                 <a:latin typeface="Aptos"/>
               </a:rPr>
-              <a:t>logger.py + plotting</a:t>
+              <a:t>Digital Twin Divergence</a:t>
             </a:r>
           </a:p>
         </p:txBody>
@@ -6190,7 +6180,7 @@
                 </a:solidFill>
                 <a:latin typeface="Aptos"/>
               </a:rPr>
-              <a:t>CSV outputs and publication-style figures</a:t>
+              <a:t/>
             </a:r>
           </a:p>
         </p:txBody>
@@ -6229,7 +6219,7 @@
                 </a:solidFill>
                 <a:latin typeface="Aptos"/>
               </a:rPr>
-              <a:t>Digital Twin Divergence</a:t>
+              <a:t/>
             </a:r>
           </a:p>
         </p:txBody>
@@ -6243,7 +6233,7 @@
 </file>
 
 <file path=ppt/slides/slide13.xml><?xml version="1.0" encoding="utf-8"?>
-<p:sld xmlns:a="http://schemas.openxmlformats.org/drawingml/2006/main" xmlns:p="http://schemas.openxmlformats.org/presentationml/2006/main" xmlns:r="http://schemas.openxmlformats.org/officeDocument/2006/relationships">
+<p:sld xmlns:a="http://schemas.openxmlformats.org/drawingml/2006/main" xmlns:p="http://schemas.openxmlformats.org/presentationml/2006/main">
   <p:cSld>
     <p:bg>
       <p:bgPr>
@@ -6294,7 +6284,7 @@
                 </a:solidFill>
                 <a:latin typeface="Aptos Display"/>
               </a:rPr>
-              <a:t>Evaluation Logic</a:t>
+              <a:t>What Has Been Completed So Far</a:t>
             </a:r>
           </a:p>
         </p:txBody>
@@ -6333,7 +6323,7 @@
                 </a:solidFill>
                 <a:latin typeface="Aptos"/>
               </a:rPr>
-              <a:t>The experiment matrix tests whether the trust boundary behaves correctly.</a:t>
+              <a:t>The packet interface is now backed by working tooling and documentation.</a:t>
             </a:r>
           </a:p>
         </p:txBody>
@@ -6462,7 +6452,7 @@
                 </a:solidFill>
                 <a:latin typeface="Aptos"/>
               </a:rPr>
-              <a:t>Operating factors</a:t>
+              <a:t>Embedded path</a:t>
             </a:r>
           </a:p>
         </p:txBody>
@@ -6501,10 +6491,7 @@
                 </a:solidFill>
                 <a:latin typeface="Aptos"/>
               </a:rPr>
-              <a:t>Speed
-Terrain / slip proxy
-Latency
-GPS noise</a:t>
+              <a:t>ugv01_gps_dev is active; BN220 stayed on the original verified RX wiring.</a:t>
             </a:r>
           </a:p>
         </p:txBody>
@@ -6588,7 +6575,7 @@
                 </a:solidFill>
                 <a:latin typeface="Aptos"/>
               </a:rPr>
-              <a:t>Attack factors</a:t>
+              <a:t>Bench tooling</a:t>
             </a:r>
           </a:p>
         </p:txBody>
@@ -6627,11 +6614,7 @@
                 </a:solidFill>
                 <a:latin typeface="Aptos"/>
               </a:rPr>
-              <a:t>No attack baseline
-Step size sweep
-Freeze
-Replay
-Random drift</a:t>
+              <a:t>bench_logger.py records T:147 and adds source/sample, send, arrival, estimate, alarm, packet loss, stale, queue depth, and clock-offset fields.</a:t>
             </a:r>
           </a:p>
         </p:txBody>
@@ -6715,7 +6698,7 @@
                 </a:solidFill>
                 <a:latin typeface="Aptos"/>
               </a:rPr>
-              <a:t>Metrics</a:t>
+              <a:t>Replay + reports</a:t>
             </a:r>
           </a:p>
         </p:txBody>
@@ -6754,11 +6737,7 @@
                 </a:solidFill>
                 <a:latin typeface="Aptos"/>
               </a:rPr>
-              <a:t>False alarm rate
-Detection probability
-Detection delay
-ROC curve
-Trust region</a:t>
+              <a:t>Hardware logs replay through the EKF/detector path and now have stationary GPS, latency, and replay-consistency reports.</a:t>
             </a:r>
           </a:p>
         </p:txBody>
@@ -6842,7 +6821,7 @@
                 </a:solidFill>
                 <a:latin typeface="Aptos"/>
               </a:rPr>
-              <a:t>Figures</a:t>
+              <a:t>Project prep</a:t>
             </a:r>
           </a:p>
         </p:txBody>
@@ -6881,11 +6860,7 @@
                 </a:solidFill>
                 <a:latin typeface="Aptos"/>
               </a:rPr>
-              <a:t>Trajectory
-Innovation
-Detection
-Uncertainty
-Boundary</a:t>
+              <a:t>Firmware docs, log dictionaries, preregistered protocol, and tracked-rover calibration utilities are already in the repo.</a:t>
             </a:r>
           </a:p>
         </p:txBody>
@@ -6924,7 +6899,7 @@
                 </a:solidFill>
                 <a:latin typeface="Aptos"/>
               </a:rPr>
-              <a:t>The important result is not one demo run. It is how detection changes as conditions change.</a:t>
+              <a:t>Digital Twin Divergence</a:t>
             </a:r>
           </a:p>
         </p:txBody>
@@ -6963,7 +6938,7 @@
                 </a:solidFill>
                 <a:latin typeface="Aptos"/>
               </a:rPr>
-              <a:t>Digital Twin Divergence</a:t>
+              <a:t/>
             </a:r>
           </a:p>
         </p:txBody>
@@ -6977,7 +6952,7 @@
 </file>
 
 <file path=ppt/slides/slide14.xml><?xml version="1.0" encoding="utf-8"?>
-<p:sld xmlns:a="http://schemas.openxmlformats.org/drawingml/2006/main" xmlns:p="http://schemas.openxmlformats.org/presentationml/2006/main" xmlns:r="http://schemas.openxmlformats.org/officeDocument/2006/relationships">
+<p:sld xmlns:a="http://schemas.openxmlformats.org/drawingml/2006/main" xmlns:p="http://schemas.openxmlformats.org/presentationml/2006/main">
   <p:cSld>
     <p:bg>
       <p:bgPr>
@@ -7028,7 +7003,7 @@
                 </a:solidFill>
                 <a:latin typeface="Aptos Display"/>
               </a:rPr>
-              <a:t>Why This Matters</a:t>
+              <a:t>What The Future Project Entails</a:t>
             </a:r>
           </a:p>
         </p:txBody>
@@ -7067,7 +7042,7 @@
                 </a:solidFill>
                 <a:latin typeface="Aptos"/>
               </a:rPr>
-              <a:t>It helps cyber-physical systems know when their sensors can be trusted.</a:t>
+              <a:t>The remaining work is a structured validation campaign built on T:147.</a:t>
             </a:r>
           </a:p>
         </p:txBody>
@@ -7151,7 +7126,7 @@
                 </a:solidFill>
                 <a:latin typeface="Aptos"/>
               </a:rPr>
-              <a:t>A traditional security check asks whether a packet is valid.</a:t>
+              <a:t>Phase 1</a:t>
             </a:r>
           </a:p>
         </p:txBody>
@@ -7190,7 +7165,7 @@
                 </a:solidFill>
                 <a:latin typeface="Aptos Display"/>
               </a:rPr>
-              <a:t>This project asks whether the measurement is physically believable.</a:t>
+              <a:t>Battery-powered safety check and confirmation that T:147 behaves correctly under self-powered rover operation.</a:t>
             </a:r>
           </a:p>
         </p:txBody>
@@ -7274,7 +7249,7 @@
                 </a:solidFill>
                 <a:latin typeface="Aptos"/>
               </a:rPr>
-              <a:t>For cybersecurity</a:t>
+              <a:t>Phase 2</a:t>
             </a:r>
           </a:p>
         </p:txBody>
@@ -7313,7 +7288,7 @@
                 </a:solidFill>
                 <a:latin typeface="Aptos"/>
               </a:rPr>
-              <a:t>Detects semantic manipulation that can bypass packet-level validity checks.</a:t>
+              <a:t>Tracked-drive calibration: left_meters_per_tick, right_meters_per_tick, effective_track_width_m, and heading_sign.</a:t>
             </a:r>
           </a:p>
         </p:txBody>
@@ -7397,7 +7372,7 @@
                 </a:solidFill>
                 <a:latin typeface="Aptos"/>
               </a:rPr>
-              <a:t>For sensors</a:t>
+              <a:t>Phase 3</a:t>
             </a:r>
           </a:p>
         </p:txBody>
@@ -7436,7 +7411,7 @@
                 </a:solidFill>
                 <a:latin typeface="Aptos"/>
               </a:rPr>
-              <a:t>Quantifies when noisy or delayed measurements are still trustworthy.</a:t>
+              <a:t>Benign baseline collection across speed, surface, and latency conditions to define normal detector behavior.</a:t>
             </a:r>
           </a:p>
         </p:txBody>
@@ -7520,7 +7495,7 @@
                 </a:solidFill>
                 <a:latin typeface="Aptos"/>
               </a:rPr>
-              <a:t>For autonomy</a:t>
+              <a:t>Phase 4+</a:t>
             </a:r>
           </a:p>
         </p:txBody>
@@ -7559,7 +7534,7 @@
                 </a:solidFill>
                 <a:latin typeface="Aptos"/>
               </a:rPr>
-              <a:t>Supports safer decisions by exposing confidence and blind regions.</a:t>
+              <a:t>Threshold locking, learned uncertainty comparison, attack trials, and final figures validating the detectability boundary.</a:t>
             </a:r>
           </a:p>
         </p:txBody>
@@ -7612,7 +7587,7 @@
 </file>
 
 <file path=ppt/slides/slide15.xml><?xml version="1.0" encoding="utf-8"?>
-<p:sld xmlns:a="http://schemas.openxmlformats.org/drawingml/2006/main" xmlns:p="http://schemas.openxmlformats.org/presentationml/2006/main" xmlns:r="http://schemas.openxmlformats.org/officeDocument/2006/relationships">
+<p:sld xmlns:a="http://schemas.openxmlformats.org/drawingml/2006/main" xmlns:p="http://schemas.openxmlformats.org/presentationml/2006/main">
   <p:cSld>
     <p:bg>
       <p:bgPr>
@@ -7663,7 +7638,7 @@
                 </a:solidFill>
                 <a:latin typeface="Aptos Display"/>
               </a:rPr>
-              <a:t>Takeaway</a:t>
+              <a:t>Immediate Next Steps</a:t>
             </a:r>
           </a:p>
         </p:txBody>
@@ -7702,7 +7677,7 @@
                 </a:solidFill>
                 <a:latin typeface="Aptos"/>
               </a:rPr>
-              <a:t>A concise advisor-facing summary.</a:t>
+              <a:t>The next milestone is moving from bench telemetry to calibrated motion data.</a:t>
             </a:r>
           </a:p>
         </p:txBody>
@@ -7786,7 +7761,7 @@
                 </a:solidFill>
                 <a:latin typeface="Aptos Display"/>
               </a:rPr>
-              <a:t>Digital Twin Divergence builds a physics-aware security layer for a mobile rover.</a:t>
+              <a:t>Install batteries and run the first lifted-track safety test.</a:t>
             </a:r>
           </a:p>
         </p:txBody>
@@ -7825,7 +7800,7 @@
               </a:defRPr>
             </a:pPr>
             <a:r>
-              <a:t>It predicts rover behavior using a Digital Twin and checks whether sensor data agrees with physical reality.</a:t>
+              <a:t>Verify T:147 under self-powered operation: seq, GPS, IMU, encoder, and stop behavior.</a:t>
             </a:r>
           </a:p>
           <a:p>
@@ -7841,7 +7816,7 @@
               </a:defRPr>
             </a:pPr>
             <a:r>
-              <a:t>It studies step, freeze, replay, and drift attacks as semantic sensor attacks, not just malformed packets.</a:t>
+              <a:t>Collect straight-line and in-place turn calibration runs from the same telemetry packet.</a:t>
             </a:r>
           </a:p>
           <a:p>
@@ -7857,7 +7832,7 @@
               </a:defRPr>
             </a:pPr>
             <a:r>
-              <a:t>Its main research value is the detectability boundary: knowing when attacks are visible, ambiguous, or hidden by uncertainty.</a:t>
+              <a:t>Begin benign field runs after calibration is locked.</a:t>
             </a:r>
           </a:p>
           <a:p>
@@ -7873,7 +7848,7 @@
               </a:defRPr>
             </a:pPr>
             <a:r>
-              <a:t>It connects cyber security, sensor fusion, communication latency, and mobile cyber-physical systems in one testable framework.</a:t>
+              <a:t>Takeaway: the packet schema is in place, the bench path is working, and the rest of the project is now an experimental validation problem.</a:t>
             </a:r>
           </a:p>
         </p:txBody>
@@ -9446,7 +9421,7 @@
 </file>
 
 <file path=ppt/slides/slide4.xml><?xml version="1.0" encoding="utf-8"?>
-<p:sld xmlns:a="http://schemas.openxmlformats.org/drawingml/2006/main" xmlns:p="http://schemas.openxmlformats.org/presentationml/2006/main" xmlns:r="http://schemas.openxmlformats.org/officeDocument/2006/relationships">
+<p:sld xmlns:a="http://schemas.openxmlformats.org/drawingml/2006/main" xmlns:p="http://schemas.openxmlformats.org/presentationml/2006/main">
   <p:cSld>
     <p:bg>
       <p:bgPr>
@@ -9497,7 +9472,7 @@
                 </a:solidFill>
                 <a:latin typeface="Aptos Display"/>
               </a:rPr>
-              <a:t>System View</a:t>
+              <a:t>Crux: Combined Telemetry Packet</a:t>
             </a:r>
           </a:p>
         </p:txBody>
@@ -9536,7 +9511,7 @@
                 </a:solidFill>
                 <a:latin typeface="Aptos"/>
               </a:rPr>
-              <a:t>The Digital Twin sits between raw telemetry and security decisions.</a:t>
+              <a:t>The main measurement interface is the firmware response to T:147.</a:t>
             </a:r>
           </a:p>
         </p:txBody>
@@ -9635,7 +9610,7 @@
                 </a:solidFill>
                 <a:latin typeface="Aptos"/>
               </a:rPr>
-              <a:t>Rover telemetry</a:t>
+              <a:t>Identity + timing</a:t>
             </a:r>
           </a:p>
         </p:txBody>
@@ -9689,7 +9664,7 @@
                 </a:solidFill>
                 <a:latin typeface="Aptos"/>
               </a:rPr>
-              <a:t>Parser</a:t>
+              <a:t>Base / encoders</a:t>
             </a:r>
           </a:p>
         </p:txBody>
@@ -9743,7 +9718,7 @@
                 </a:solidFill>
                 <a:latin typeface="Aptos"/>
               </a:rPr>
-              <a:t>Digital Twin</a:t>
+              <a:t>IMU attitude + raw motion</a:t>
             </a:r>
           </a:p>
         </p:txBody>
@@ -9797,7 +9772,7 @@
                 </a:solidFill>
                 <a:latin typeface="Aptos"/>
               </a:rPr>
-              <a:t>Trust detector</a:t>
+              <a:t>GPS state + health</a:t>
             </a:r>
           </a:p>
         </p:txBody>
@@ -9851,7 +9826,7 @@
                 </a:solidFill>
                 <a:latin typeface="Aptos"/>
               </a:rPr>
-              <a:t>Logs + plots</a:t>
+              <a:t>Edge-side timing use</a:t>
             </a:r>
           </a:p>
         </p:txBody>
@@ -10075,7 +10050,7 @@
                 </a:solidFill>
                 <a:latin typeface="Aptos"/>
               </a:rPr>
-              <a:t>Main output</a:t>
+              <a:t>T:147 contents</a:t>
             </a:r>
           </a:p>
         </p:txBody>
@@ -10114,7 +10089,7 @@
                 </a:solidFill>
                 <a:latin typeface="Aptos"/>
               </a:rPr>
-              <a:t>A time-aligned record of rover state, predicted state, sensor disagreement, attack label, detection result, confidence region, and uncertainty level.</a:t>
+              <a:t>T:147 returns seq, sample_ms, millis, send_ms, L/R, enc_left/right, battery voltage, roll/pitch/yaw, raw IMU channels, GPS fix/lat/lon/sat/hdop, and GPS checksum/character counters.</a:t>
             </a:r>
           </a:p>
         </p:txBody>
